--- a/deliverables/vet-society-2026-11-02-animal-welfare-ai/Animal_Welfare_AI_Cattle_발표자노트포함.pptx
+++ b/deliverables/vet-society-2026-11-02-animal-welfare-ai/Animal_Welfare_AI_Cattle_발표자노트포함.pptx
@@ -516,17 +516,17 @@
           <a:lstStyle/>
           <a:p>
             <a:r>
-              <a:t>[발표 스크립트 · 0:40]</a:t>
-            </a:r>
-          </a:p>
-          <a:p>
-            <a:r>
-              <a:t>안녕하십니까. 고려동물병원 하현제입니다.</a:t>
-            </a:r>
-          </a:p>
-          <a:p>
-            <a:r>
-              <a:t>오늘 말씀드릴 주제는 「소의 동물복지와 AI」입니다.</a:t>
+              <a:t>[발표 스크립트 · 0:50]</a:t>
+            </a:r>
+          </a:p>
+          <a:p>
+            <a:r>
+              <a:t>좌장님, 소개 감사합니다. 고려동물병원 하현제입니다.</a:t>
+            </a:r>
+          </a:p>
+          <a:p>
+            <a:r>
+              <a:t>앞서 돼지와 산란계에서 수의사가 복지를 위해 무엇을 할 수 있는지 좋은 말씀을 들었습니다. 저는 이 세션의 마지막 순서로 소를 말씀드리겠습니다. 그리고 AI라는 새로운 도구가 농장동물 복지에서 수의사의 역할을 어떻게 넓힐 수 있는지를 이야기하겠습니다.</a:t>
             </a:r>
           </a:p>
           <a:p/>
@@ -1385,7 +1385,7 @@
           <a:lstStyle/>
           <a:p>
             <a:r>
-              <a:t>[발표 스크립트 · 0:50]</a:t>
+              <a:t>[발표 스크립트 · 1:05]</a:t>
             </a:r>
           </a:p>
           <a:p>
@@ -1407,6 +1407,11 @@
           <a:p>
             <a:r>
               <a:t>그리고 그 이해를 실제 복지로 바꾸는 것은 수의사와 농장주, 바로 우리입니다.</a:t>
+            </a:r>
+          </a:p>
+          <a:p>
+            <a:r>
+              <a:t>오늘 세션의 질문, 농장동물 복지에서 수의사의 역할이 무엇인가에 대한 제 답은 이렇습니다. 기술이 24시간 지켜보는 시대에도, 그 신호를 고통을 줄이는 행동으로 바꾸는 마지막 책임은 수의사에게 있습니다.</a:t>
             </a:r>
           </a:p>
           <a:p/>
@@ -2325,7 +2330,7 @@
           <a:lstStyle/>
           <a:p>
             <a:r>
-              <a:t>[발표 스크립트 · 1:10]</a:t>
+              <a:t>[발표 스크립트 · 1:25]</a:t>
             </a:r>
           </a:p>
           <a:p>
@@ -2362,6 +2367,11 @@
           <a:p>
             <a:r>
               <a:t>복지의 최종 판단과 임상 책임은 사람, 바로 이 자리에 계신 수의사 여러분에게 있습니다. AI는 그 판단을 더 빨리, 더 정확한 대상에게 가도록 돕는 도구입니다.</a:t>
+            </a:r>
+          </a:p>
+          <a:p>
+            <a:r>
+              <a:t>오늘 세션의 주제가 '농장동물 복지에서 수의사의 역할'인데, 이 고리 안에서 수의사는 알림을 받는 사람이 아니라 고리를 닫는 사람입니다. 확인하고, 판단하고, 결과를 기록해 다음 판단을 더 낫게 만드는 사람입니다.</a:t>
             </a:r>
           </a:p>
         </p:txBody>
@@ -2679,7 +2689,7 @@
                   <a:srgbClr val="6B746F"/>
                 </a:solidFill>
               </a:rPr>
-              <a:t>Korea Animal Hospital · D2O / CowTalk</a:t>
+              <a:t>Korea Animal Clinic · D2O / CowTalk</a:t>
             </a:r>
             <a:endParaRPr lang="en-US" sz="800" dirty="0"/>
           </a:p>
@@ -3366,7 +3376,7 @@
                   <a:srgbClr val="FFFFFF"/>
                 </a:solidFill>
               </a:rPr>
-              <a:t>Korea Animal Hospital · D2O / CowTalk</a:t>
+              <a:t>Korea Animal Clinic · D2O / CowTalk</a:t>
             </a:r>
             <a:endParaRPr lang="en-US" sz="1400" dirty="0"/>
           </a:p>

--- a/deliverables/vet-society-2026-11-02-animal-welfare-ai/Animal_Welfare_AI_Cattle_발표자노트포함.pptx
+++ b/deliverables/vet-society-2026-11-02-animal-welfare-ai/Animal_Welfare_AI_Cattle_발표자노트포함.pptx
@@ -516,7 +516,7 @@
           <a:lstStyle/>
           <a:p>
             <a:r>
-              <a:t>[발표 스크립트 · 0:50]</a:t>
+              <a:t>[발표 스크립트 · 1:05]</a:t>
             </a:r>
           </a:p>
           <a:p>
@@ -527,6 +527,12 @@
           <a:p>
             <a:r>
               <a:t>앞서 돼지와 산란계에서 수의사가 복지를 위해 무엇을 할 수 있는지 좋은 말씀을 들었습니다. 저는 이 세션의 마지막 순서로 소를 말씀드리겠습니다. 그리고 AI라는 새로운 도구가 농장동물 복지에서 수의사의 역할을 어떻게 넓힐 수 있는지를 이야기하겠습니다.</a:t>
+            </a:r>
+          </a:p>
+          <a:p/>
+          <a:p>
+            <a:r>
+              <a:t>시작하기 전에 이해관계를 먼저 밝힙니다. 저는 CowTalk을 개발한 ㈜디투오에 소속되어 있고, 디투오는 국내에서 smaXtec 시스템을 유통하고 있습니다. 화면 아래에도 적어 두었습니다.</a:t>
             </a:r>
           </a:p>
           <a:p/>
@@ -933,7 +939,7 @@
           </a:p>
           <a:p>
             <a:r>
-              <a:t>열스트레스, 사료 변경, 환경 변화와 같이 움직이는가, 이것이 농장 패턴입니다.</a:t>
+              <a:t>열스트레스, 사료 변경, 환경 변화와 같이 움직이는가, 이것이 농장 패턴입니다. 여기서 더 나아가면 농장끼리 패턴을 비교해, 어느 농장에 같은 위험이 되풀이되는지도 볼 수 있습니다.</a:t>
             </a:r>
           </a:p>
           <a:p/>
@@ -1385,7 +1391,7 @@
           <a:lstStyle/>
           <a:p>
             <a:r>
-              <a:t>[발표 스크립트 · 1:05]</a:t>
+              <a:t>[발표 스크립트 · 1:15]</a:t>
             </a:r>
           </a:p>
           <a:p>
@@ -1418,6 +1424,11 @@
           <a:p>
             <a:r>
               <a:t>동물복지는 1년에 한 번 찍는 스냅샷이어서는 안 됩니다. 365일 지속적으로 받아야 할 주의입니다.</a:t>
+            </a:r>
+          </a:p>
+          <a:p>
+            <a:r>
+              <a:t>AI는 사람의 돌봄을 대신하려는 것이 아닙니다. 소 한 마리 한 마리가 이미 우리에게 하고 있는 말을, 우리가 더 꾸준히 듣도록 돕기 위한 것입니다.</a:t>
             </a:r>
           </a:p>
           <a:p/>
@@ -1825,7 +1836,7 @@
           <a:p/>
           <a:p>
             <a:r>
-              <a:t>오른쪽의 연속적 주의, Continuous attention은 그 빈틈을 채우는 접근입니다. 24시간 생체·행동 신호를 보면서 "오늘 누구를 먼저 확인해야 하는가?"를 계속 묻는 것입니다.</a:t>
+              <a:t>오른쪽의 연속적 주의, Continuous attention은 그 빈틈을 채우는 접근입니다. 관찰을 하루 전체로 넓히되, 직접 진찰을 대신하지는 않습니다. 24시간 생체·행동 신호를 보면서 "오늘 누구를 먼저 확인해야 하는가?"를 계속 묻는 것입니다.</a:t>
             </a:r>
           </a:p>
           <a:p/>
@@ -2102,6 +2113,11 @@
               <a:t>여기서도 선을 하나 긋겠습니다. smaXtec은 '복지 판정기'가 아닙니다. 연속 생체신호를 공급하는 장치, 즉 듣는 귀입니다.</a:t>
             </a:r>
           </a:p>
+          <a:p>
+            <a:r>
+              <a:t>저희는 이 데이터를 진단이나 완성된 복지 점수가 아니라, 생물학적 신호로 다룹니다.</a:t>
+            </a:r>
+          </a:p>
           <a:p/>
           <a:p>
             <a:r>
@@ -2489,7 +2505,12 @@
           <a:p/>
           <a:p>
             <a:r>
-              <a:t>아래 문장을 기억해 주십시오. 목표는 'AI 진단'이 아닙니다.</a:t>
+              <a:t>초록에도 쓴 문장을 그대로 말씀드리겠습니다. 동물복지 관점에서 AI의 가치는 자율 진단이 아닙니다. 지속적인 주의, continuous attention입니다.</a:t>
+            </a:r>
+          </a:p>
+          <a:p>
+            <a:r>
+              <a:t>목표는 'AI 진단'이 아닙니다.</a:t>
             </a:r>
           </a:p>
           <a:p>
@@ -3393,6 +3414,39 @@
               <a:t>hhj3150@hanmail.net</a:t>
             </a:r>
             <a:endParaRPr lang="en-US" sz="1400" dirty="0"/>
+          </a:p>
+        </p:txBody>
+      </p:sp>
+      <p:sp>
+        <p:nvSpPr>
+          <p:cNvPr id="9" name="TextBox 8"/>
+          <p:cNvSpPr txBox="1"/>
+          <p:nvPr/>
+        </p:nvSpPr>
+        <p:spPr>
+          <a:xfrm>
+            <a:off x="685800" y="6263640"/>
+            <a:ext cx="7863840" cy="365760"/>
+          </a:xfrm>
+          <a:prstGeom prst="rect">
+            <a:avLst/>
+          </a:prstGeom>
+          <a:noFill/>
+        </p:spPr>
+        <p:txBody>
+          <a:bodyPr wrap="square">
+            <a:spAutoFit/>
+          </a:bodyPr>
+          <a:lstStyle/>
+          <a:p>
+            <a:r>
+              <a:rPr sz="1000">
+                <a:solidFill>
+                  <a:srgbClr val="C9D6CF"/>
+                </a:solidFill>
+              </a:rPr>
+              <a:t>Disclosure: The author is affiliated with D2O Co., Ltd., developer of CowTalk. D2O distributes smaXtec systems in Korea.</a:t>
+            </a:r>
           </a:p>
         </p:txBody>
       </p:sp>
